--- a/Introduccion a la Ingenieria/Clases/Clase 10 - Herramientas digitales aplicadas a la Ingenieria/Presentacion.pptx
+++ b/Introduccion a la Ingenieria/Clases/Clase 10 - Herramientas digitales aplicadas a la Ingenieria/Presentacion.pptx
@@ -5905,7 +5905,7 @@
               </a:spcAft>
             </a:pPr>
             <a:r>
-              <a:rPr sz="1600" b="0" i="0">
+              <a:rPr sz="2000" b="0" i="0">
                 <a:solidFill>
                   <a:srgbClr val="333333"/>
                 </a:solidFill>
@@ -5914,7 +5914,7 @@
               <a:t>–   </a:t>
             </a:r>
             <a:r>
-              <a:rPr sz="1600" b="1" i="0">
+              <a:rPr sz="2000" b="1" i="0">
                 <a:solidFill>
                   <a:srgbClr val="333333"/>
                 </a:solidFill>
@@ -5923,7 +5923,7 @@
               <a:t>Trabajo dirigido:</a:t>
             </a:r>
             <a:r>
-              <a:rPr sz="1600" b="0" i="0">
+              <a:rPr sz="2000" b="0" i="0">
                 <a:solidFill>
                   <a:srgbClr val="333333"/>
                 </a:solidFill>
@@ -5932,7 +5932,7 @@
               <a:t> Introducción a software de prototipado — terminar las tres pantallas con </a:t>
             </a:r>
             <a:r>
-              <a:rPr sz="1600" b="1" i="0">
+              <a:rPr sz="2000" b="1" i="0">
                 <a:solidFill>
                   <a:srgbClr val="333333"/>
                 </a:solidFill>
@@ -5941,7 +5941,7 @@
               <a:t>todos</a:t>
             </a:r>
             <a:r>
-              <a:rPr sz="1600" b="0" i="0">
+              <a:rPr sz="2000" b="0" i="0">
                 <a:solidFill>
                   <a:srgbClr val="333333"/>
                 </a:solidFill>
@@ -5957,7 +5957,7 @@
               </a:spcAft>
             </a:pPr>
             <a:r>
-              <a:rPr sz="1600" b="0" i="0">
+              <a:rPr sz="2000" b="0" i="0">
                 <a:solidFill>
                   <a:srgbClr val="333333"/>
                 </a:solidFill>
@@ -5966,7 +5966,7 @@
               <a:t>–   </a:t>
             </a:r>
             <a:r>
-              <a:rPr sz="1600" b="1" i="0">
+              <a:rPr sz="2000" b="1" i="0">
                 <a:solidFill>
                   <a:srgbClr val="333333"/>
                 </a:solidFill>
@@ -5975,7 +5975,7 @@
               <a:t>Trabajo independiente:</a:t>
             </a:r>
             <a:r>
-              <a:rPr sz="1600" b="0" i="0">
+              <a:rPr sz="2000" b="0" i="0">
                 <a:solidFill>
                   <a:srgbClr val="333333"/>
                 </a:solidFill>
@@ -5984,7 +5984,7 @@
               <a:t> Práctica básica con herramientas digitales: convertir el prototipo en </a:t>
             </a:r>
             <a:r>
-              <a:rPr sz="1600" b="1" i="0">
+              <a:rPr sz="2000" b="1" i="0">
                 <a:solidFill>
                   <a:srgbClr val="333333"/>
                 </a:solidFill>
@@ -5993,7 +5993,7 @@
               <a:t>navegable</a:t>
             </a:r>
             <a:r>
-              <a:rPr sz="1600" b="0" i="0">
+              <a:rPr sz="2000" b="0" i="0">
                 <a:solidFill>
                   <a:srgbClr val="333333"/>
                 </a:solidFill>
@@ -6009,7 +6009,7 @@
               </a:spcAft>
             </a:pPr>
             <a:r>
-              <a:rPr sz="1600" b="0" i="0">
+              <a:rPr sz="2000" b="0" i="0">
                 <a:solidFill>
                   <a:srgbClr val="333333"/>
                 </a:solidFill>
@@ -6018,7 +6018,7 @@
               <a:t>–   </a:t>
             </a:r>
             <a:r>
-              <a:rPr sz="1600" b="1" i="0">
+              <a:rPr sz="2000" b="1" i="0">
                 <a:solidFill>
                   <a:srgbClr val="333333"/>
                 </a:solidFill>
@@ -6027,7 +6027,7 @@
               <a:t>Sesión 11 · Taller de prototipado inicial con IA</a:t>
             </a:r>
             <a:r>
-              <a:rPr sz="1600" b="0" i="0">
+              <a:rPr sz="2000" b="0" i="0">
                 <a:solidFill>
                   <a:srgbClr val="333333"/>
                 </a:solidFill>
@@ -6036,7 +6036,7 @@
               <a:t> — </a:t>
             </a:r>
             <a:r>
-              <a:rPr sz="1600" b="1" i="0">
+              <a:rPr sz="2000" b="1" i="0">
                 <a:solidFill>
                   <a:srgbClr val="333333"/>
                 </a:solidFill>
@@ -6045,7 +6045,7 @@
               <a:t>prototipo v2 con IA autorizada</a:t>
             </a:r>
             <a:r>
-              <a:rPr sz="1600" b="0" i="0">
+              <a:rPr sz="2000" b="0" i="0">
                 <a:solidFill>
                   <a:srgbClr val="333333"/>
                 </a:solidFill>
@@ -6054,7 +6054,7 @@
               <a:t>: generar variantes, elegir con criterio y corregir lo que la IA no sabía. Y la </a:t>
             </a:r>
             <a:r>
-              <a:rPr sz="1600" b="1" i="0">
+              <a:rPr sz="2000" b="1" i="0">
                 <a:solidFill>
                   <a:srgbClr val="333333"/>
                 </a:solidFill>
@@ -6063,7 +6063,7 @@
               <a:t>evaluación del corte 2</a:t>
             </a:r>
             <a:r>
-              <a:rPr sz="1600" b="0" i="0">
+              <a:rPr sz="2000" b="0" i="0">
                 <a:solidFill>
                   <a:srgbClr val="333333"/>
                 </a:solidFill>
@@ -6079,7 +6079,7 @@
               </a:spcAft>
             </a:pPr>
             <a:r>
-              <a:rPr sz="1600" b="0" i="0">
+              <a:rPr sz="2000" b="0" i="0">
                 <a:solidFill>
                   <a:srgbClr val="333333"/>
                 </a:solidFill>
@@ -6088,7 +6088,7 @@
               <a:t>–   </a:t>
             </a:r>
             <a:r>
-              <a:rPr sz="1600" b="1" i="0">
+              <a:rPr sz="2000" b="1" i="0">
                 <a:solidFill>
                   <a:srgbClr val="333333"/>
                 </a:solidFill>
@@ -6097,7 +6097,7 @@
               <a:t>Aviso:</a:t>
             </a:r>
             <a:r>
-              <a:rPr sz="1600" b="0" i="0">
+              <a:rPr sz="2000" b="0" i="0">
                 <a:solidFill>
                   <a:srgbClr val="333333"/>
                 </a:solidFill>
@@ -6106,7 +6106,7 @@
               <a:t> La sesión 11 </a:t>
             </a:r>
             <a:r>
-              <a:rPr sz="1600" b="1" i="0">
+              <a:rPr sz="2000" b="1" i="0">
                 <a:solidFill>
                   <a:srgbClr val="333333"/>
                 </a:solidFill>
@@ -6115,7 +6115,7 @@
               <a:t>cierra el corte 2</a:t>
             </a:r>
             <a:r>
-              <a:rPr sz="1600" b="0" i="0">
+              <a:rPr sz="2000" b="0" i="0">
                 <a:solidFill>
                   <a:srgbClr val="333333"/>
                 </a:solidFill>
@@ -6124,7 +6124,7 @@
               <a:t>: hay 20 minutos de evaluación al final, sobre las sesiones 7 a 11. Traigan el prototipo terminado y navegable — sin él no hay nada que corregir con IA, y ese es el entregable de la sesión. La evaluación es </a:t>
             </a:r>
             <a:r>
-              <a:rPr sz="1600" b="1" i="0">
+              <a:rPr sz="2000" b="1" i="0">
                 <a:solidFill>
                   <a:srgbClr val="333333"/>
                 </a:solidFill>
@@ -6133,7 +6133,7 @@
               <a:t>a libro abierto sobre los documentos de su equipo</a:t>
             </a:r>
             <a:r>
-              <a:rPr sz="1600" b="0" i="0">
+              <a:rPr sz="2000" b="0" i="0">
                 <a:solidFill>
                   <a:srgbClr val="333333"/>
                 </a:solidFill>
@@ -6149,7 +6149,7 @@
               </a:spcAft>
             </a:pPr>
             <a:r>
-              <a:rPr sz="1600" b="0" i="0">
+              <a:rPr sz="2000" b="0" i="0">
                 <a:solidFill>
                   <a:srgbClr val="333333"/>
                 </a:solidFill>
@@ -6158,7 +6158,7 @@
               <a:t>–   </a:t>
             </a:r>
             <a:r>
-              <a:rPr sz="1600" b="1" i="0">
+              <a:rPr sz="2000" b="1" i="0">
                 <a:solidFill>
                   <a:srgbClr val="333333"/>
                 </a:solidFill>
@@ -6167,7 +6167,7 @@
               <a:t>Antes de salir:</a:t>
             </a:r>
             <a:r>
-              <a:rPr sz="1600" b="0" i="0">
+              <a:rPr sz="2000" b="0" i="0">
                 <a:solidFill>
                   <a:srgbClr val="333333"/>
                 </a:solidFill>
@@ -6741,7 +6741,7 @@
         <p:spPr>
           <a:xfrm>
             <a:off x="502920" y="2798064"/>
-            <a:ext cx="2164019" cy="2560320"/>
+            <a:ext cx="2164019" cy="3099816"/>
           </a:xfrm>
           <a:prstGeom prst="rect">
             <a:avLst/>
@@ -6856,7 +6856,7 @@
         <p:spPr>
           <a:xfrm>
             <a:off x="2758379" y="2798064"/>
-            <a:ext cx="2164019" cy="2560320"/>
+            <a:ext cx="2164019" cy="3099816"/>
           </a:xfrm>
           <a:prstGeom prst="rect">
             <a:avLst/>
@@ -6971,7 +6971,7 @@
         <p:spPr>
           <a:xfrm>
             <a:off x="5013838" y="2798064"/>
-            <a:ext cx="2164019" cy="2560320"/>
+            <a:ext cx="2164019" cy="3099816"/>
           </a:xfrm>
           <a:prstGeom prst="rect">
             <a:avLst/>
@@ -7086,7 +7086,7 @@
         <p:spPr>
           <a:xfrm>
             <a:off x="7269297" y="2798064"/>
-            <a:ext cx="2164019" cy="2560320"/>
+            <a:ext cx="2164019" cy="3099816"/>
           </a:xfrm>
           <a:prstGeom prst="rect">
             <a:avLst/>
@@ -7201,7 +7201,7 @@
         <p:spPr>
           <a:xfrm>
             <a:off x="9524756" y="2798064"/>
-            <a:ext cx="2164019" cy="2560320"/>
+            <a:ext cx="2164019" cy="3099816"/>
           </a:xfrm>
           <a:prstGeom prst="rect">
             <a:avLst/>
@@ -7235,8 +7235,8 @@
         </p:nvSpPr>
         <p:spPr>
           <a:xfrm>
-            <a:off x="457200" y="5943600"/>
-            <a:ext cx="11277295" cy="365760"/>
+            <a:off x="457200" y="5806440"/>
+            <a:ext cx="11277295" cy="640080"/>
           </a:xfrm>
           <a:prstGeom prst="rect">
             <a:avLst/>
@@ -7489,7 +7489,7 @@
               </a:spcAft>
             </a:pPr>
             <a:r>
-              <a:rPr sz="1600" b="0" i="0">
+              <a:rPr sz="2000" b="0" i="0">
                 <a:solidFill>
                   <a:srgbClr val="333333"/>
                 </a:solidFill>
@@ -7498,7 +7498,7 @@
               <a:t>–   Distinguir un </a:t>
             </a:r>
             <a:r>
-              <a:rPr sz="1600" b="1" i="0">
+              <a:rPr sz="2000" b="1" i="0">
                 <a:solidFill>
                   <a:srgbClr val="333333"/>
                 </a:solidFill>
@@ -7507,7 +7507,7 @@
               <a:t>prototipo</a:t>
             </a:r>
             <a:r>
-              <a:rPr sz="1600" b="0" i="0">
+              <a:rPr sz="2000" b="0" i="0">
                 <a:solidFill>
                   <a:srgbClr val="333333"/>
                 </a:solidFill>
@@ -7516,7 +7516,7 @@
               <a:t> de una versión inacabada, y saber qué pregunta responde cada nivel de </a:t>
             </a:r>
             <a:r>
-              <a:rPr sz="1600" b="1" i="0">
+              <a:rPr sz="2000" b="1" i="0">
                 <a:solidFill>
                   <a:srgbClr val="333333"/>
                 </a:solidFill>
@@ -7525,7 +7525,7 @@
               <a:t>fidelidad</a:t>
             </a:r>
             <a:r>
-              <a:rPr sz="1600" b="0" i="0">
+              <a:rPr sz="2000" b="0" i="0">
                 <a:solidFill>
                   <a:srgbClr val="333333"/>
                 </a:solidFill>
@@ -7541,7 +7541,7 @@
               </a:spcAft>
             </a:pPr>
             <a:r>
-              <a:rPr sz="1600" b="0" i="0">
+              <a:rPr sz="2000" b="0" i="0">
                 <a:solidFill>
                   <a:srgbClr val="333333"/>
                 </a:solidFill>
@@ -7550,7 +7550,7 @@
               <a:t>–   Dibujar las </a:t>
             </a:r>
             <a:r>
-              <a:rPr sz="1600" b="1" i="0">
+              <a:rPr sz="2000" b="1" i="0">
                 <a:solidFill>
                   <a:srgbClr val="333333"/>
                 </a:solidFill>
@@ -7559,7 +7559,7 @@
               <a:t>tres pantallas o pasos</a:t>
             </a:r>
             <a:r>
-              <a:rPr sz="1600" b="0" i="0">
+              <a:rPr sz="2000" b="0" i="0">
                 <a:solidFill>
                   <a:srgbClr val="333333"/>
                 </a:solidFill>
@@ -7575,7 +7575,7 @@
               </a:spcAft>
             </a:pPr>
             <a:r>
-              <a:rPr sz="1600" b="0" i="0">
+              <a:rPr sz="2000" b="0" i="0">
                 <a:solidFill>
                   <a:srgbClr val="333333"/>
                 </a:solidFill>
@@ -7584,7 +7584,7 @@
               <a:t>–   Diseñar el </a:t>
             </a:r>
             <a:r>
-              <a:rPr sz="1600" b="1" i="0">
+              <a:rPr sz="2000" b="1" i="0">
                 <a:solidFill>
                   <a:srgbClr val="333333"/>
                 </a:solidFill>
@@ -7593,7 +7593,7 @@
               <a:t>estado vacío y el estado de error</a:t>
             </a:r>
             <a:r>
-              <a:rPr sz="1600" b="0" i="0">
+              <a:rPr sz="2000" b="0" i="0">
                 <a:solidFill>
                   <a:srgbClr val="333333"/>
                 </a:solidFill>
@@ -7609,7 +7609,7 @@
               </a:spcAft>
             </a:pPr>
             <a:r>
-              <a:rPr sz="1600" b="0" i="0">
+              <a:rPr sz="2000" b="0" i="0">
                 <a:solidFill>
                   <a:srgbClr val="333333"/>
                 </a:solidFill>
@@ -7618,7 +7618,7 @@
               <a:t>–   Elegir la </a:t>
             </a:r>
             <a:r>
-              <a:rPr sz="1600" b="1" i="0">
+              <a:rPr sz="2000" b="1" i="0">
                 <a:solidFill>
                   <a:srgbClr val="333333"/>
                 </a:solidFill>
@@ -7627,7 +7627,7 @@
               <a:t>herramienta según la pregunta</a:t>
             </a:r>
             <a:r>
-              <a:rPr sz="1600" b="0" i="0">
+              <a:rPr sz="2000" b="0" i="0">
                 <a:solidFill>
                   <a:srgbClr val="333333"/>
                 </a:solidFill>
@@ -10288,7 +10288,7 @@
           <a:lstStyle/>
           <a:p>
             <a:r>
-              <a:rPr sz="1500" b="1" i="0">
+              <a:rPr sz="1400" b="1" i="0">
                 <a:solidFill>
                   <a:srgbClr val="095292"/>
                 </a:solidFill>
@@ -10304,7 +10304,7 @@
               </a:spcBef>
             </a:pPr>
             <a:r>
-              <a:rPr sz="1300" b="0" i="0">
+              <a:rPr sz="1200" b="0" i="0">
                 <a:solidFill>
                   <a:srgbClr val="333333"/>
                 </a:solidFill>
@@ -10313,7 +10313,7 @@
               <a:t>«Buscar título» y no «texto aquí». </a:t>
             </a:r>
             <a:r>
-              <a:rPr sz="1300" b="1" i="0">
+              <a:rPr sz="1200" b="1" i="0">
                 <a:solidFill>
                   <a:srgbClr val="333333"/>
                 </a:solidFill>
@@ -10322,7 +10322,7 @@
               <a:t>Los textos falsos esconden los problemas</a:t>
             </a:r>
             <a:r>
-              <a:rPr sz="1300" b="0" i="0">
+              <a:rPr sz="1200" b="0" i="0">
                 <a:solidFill>
                   <a:srgbClr val="333333"/>
                 </a:solidFill>

--- a/Introduccion a la Ingenieria/Clases/Clase 10 - Herramientas digitales aplicadas a la Ingenieria/Presentacion.pptx
+++ b/Introduccion a la Ingenieria/Clases/Clase 10 - Herramientas digitales aplicadas a la Ingenieria/Presentacion.pptx
@@ -6069,7 +6069,7 @@
                 </a:solidFill>
                 <a:latin typeface="Calibri"/>
               </a:rPr>
-              <a:t> en ExamLab, sobre las sesiones 7 a 11.</a:t>
+              <a:t> en la plataforma del curso, sobre las sesiones 7 a 11.</a:t>
             </a:r>
           </a:p>
           <a:p>

--- a/Introduccion a la Ingenieria/Clases/Clase 10 - Herramientas digitales aplicadas a la Ingenieria/Presentacion.pptx
+++ b/Introduccion a la Ingenieria/Clases/Clase 10 - Herramientas digitales aplicadas a la Ingenieria/Presentacion.pptx
@@ -5872,7 +5872,7 @@
                 </a:solidFill>
                 <a:latin typeface="Calibri"/>
               </a:rPr>
-              <a:t>Para la sesión 11</a:t>
+              <a:t>Para la Clase 11</a:t>
             </a:r>
           </a:p>
         </p:txBody>
@@ -6024,7 +6024,7 @@
                 </a:solidFill>
                 <a:latin typeface="Calibri"/>
               </a:rPr>
-              <a:t>Sesión 11 · Taller de prototipado inicial con IA</a:t>
+              <a:t>Clase 11 · Taller de prototipado inicial con IA</a:t>
             </a:r>
             <a:r>
               <a:rPr sz="2000" b="0" i="0">
@@ -9582,7 +9582,7 @@
                 </a:solidFill>
                 <a:latin typeface="Calibri"/>
               </a:rPr>
-              <a:t> fidelidad. La alta aparece en la sesión 14, solo para la presentación final.</a:t>
+              <a:t> fidelidad. La alta aparece en la Clase 14, solo para la presentación final.</a:t>
             </a:r>
           </a:p>
         </p:txBody>
@@ -11867,7 +11867,7 @@
                 </a:solidFill>
                 <a:latin typeface="Calibri"/>
               </a:rPr>
-              <a:t> Se califica que el flujo se entienda, que los textos sean reales y que existan el estado vacío y el de error. Un equipo que gasta el taller eligiendo colores llega a la sesión 12 sin nada que probar.</a:t>
+              <a:t> Se califica que el flujo se entienda, que los textos sean reales y que existan el estado vacío y el de error. Un equipo que gasta el taller eligiendo colores llega a la Clase 12 sin nada que probar.</a:t>
             </a:r>
           </a:p>
         </p:txBody>
